--- a/assets/pptx/catalog-39.pptx
+++ b/assets/pptx/catalog-39.pptx
@@ -3942,7 +3942,7 @@
                 <a:ea typeface="Ebrima"/>
                 <a:cs typeface="Ebrima"/>
               </a:rPr>
-              <a:t>ኢየሱስ ያልራራ ለነፍሱ (2x)</a:t>
+              <a:t>ኢየሱስ ያልራራ ለነፍሱ 2x</a:t>
             </a:r>
           </a:p>
         </p:txBody>
